--- a/webmaster_kesz.pptx
+++ b/webmaster_kesz.pptx
@@ -266,7 +266,7 @@
           <a:p>
             <a:fld id="{5F3570C4-4F85-4B25-9210-B04BFA5F8AEB}" type="datetimeFigureOut">
               <a:rPr lang="hu-HU" smtClean="0"/>
-              <a:t>2026. 02. 18.</a:t>
+              <a:t>2026. 02. 23.</a:t>
             </a:fld>
             <a:endParaRPr lang="hu-HU"/>
           </a:p>
@@ -464,7 +464,7 @@
           <a:p>
             <a:fld id="{5F3570C4-4F85-4B25-9210-B04BFA5F8AEB}" type="datetimeFigureOut">
               <a:rPr lang="hu-HU" smtClean="0"/>
-              <a:t>2026. 02. 18.</a:t>
+              <a:t>2026. 02. 23.</a:t>
             </a:fld>
             <a:endParaRPr lang="hu-HU"/>
           </a:p>
@@ -672,7 +672,7 @@
           <a:p>
             <a:fld id="{5F3570C4-4F85-4B25-9210-B04BFA5F8AEB}" type="datetimeFigureOut">
               <a:rPr lang="hu-HU" smtClean="0"/>
-              <a:t>2026. 02. 18.</a:t>
+              <a:t>2026. 02. 23.</a:t>
             </a:fld>
             <a:endParaRPr lang="hu-HU"/>
           </a:p>
@@ -870,7 +870,7 @@
           <a:p>
             <a:fld id="{5F3570C4-4F85-4B25-9210-B04BFA5F8AEB}" type="datetimeFigureOut">
               <a:rPr lang="hu-HU" smtClean="0"/>
-              <a:t>2026. 02. 18.</a:t>
+              <a:t>2026. 02. 23.</a:t>
             </a:fld>
             <a:endParaRPr lang="hu-HU"/>
           </a:p>
@@ -1145,7 +1145,7 @@
           <a:p>
             <a:fld id="{5F3570C4-4F85-4B25-9210-B04BFA5F8AEB}" type="datetimeFigureOut">
               <a:rPr lang="hu-HU" smtClean="0"/>
-              <a:t>2026. 02. 18.</a:t>
+              <a:t>2026. 02. 23.</a:t>
             </a:fld>
             <a:endParaRPr lang="hu-HU"/>
           </a:p>
@@ -1410,7 +1410,7 @@
           <a:p>
             <a:fld id="{5F3570C4-4F85-4B25-9210-B04BFA5F8AEB}" type="datetimeFigureOut">
               <a:rPr lang="hu-HU" smtClean="0"/>
-              <a:t>2026. 02. 18.</a:t>
+              <a:t>2026. 02. 23.</a:t>
             </a:fld>
             <a:endParaRPr lang="hu-HU"/>
           </a:p>
@@ -1822,7 +1822,7 @@
           <a:p>
             <a:fld id="{5F3570C4-4F85-4B25-9210-B04BFA5F8AEB}" type="datetimeFigureOut">
               <a:rPr lang="hu-HU" smtClean="0"/>
-              <a:t>2026. 02. 18.</a:t>
+              <a:t>2026. 02. 23.</a:t>
             </a:fld>
             <a:endParaRPr lang="hu-HU"/>
           </a:p>
@@ -1963,7 +1963,7 @@
           <a:p>
             <a:fld id="{5F3570C4-4F85-4B25-9210-B04BFA5F8AEB}" type="datetimeFigureOut">
               <a:rPr lang="hu-HU" smtClean="0"/>
-              <a:t>2026. 02. 18.</a:t>
+              <a:t>2026. 02. 23.</a:t>
             </a:fld>
             <a:endParaRPr lang="hu-HU"/>
           </a:p>
@@ -2076,7 +2076,7 @@
           <a:p>
             <a:fld id="{5F3570C4-4F85-4B25-9210-B04BFA5F8AEB}" type="datetimeFigureOut">
               <a:rPr lang="hu-HU" smtClean="0"/>
-              <a:t>2026. 02. 18.</a:t>
+              <a:t>2026. 02. 23.</a:t>
             </a:fld>
             <a:endParaRPr lang="hu-HU"/>
           </a:p>
@@ -2387,7 +2387,7 @@
           <a:p>
             <a:fld id="{5F3570C4-4F85-4B25-9210-B04BFA5F8AEB}" type="datetimeFigureOut">
               <a:rPr lang="hu-HU" smtClean="0"/>
-              <a:t>2026. 02. 18.</a:t>
+              <a:t>2026. 02. 23.</a:t>
             </a:fld>
             <a:endParaRPr lang="hu-HU"/>
           </a:p>
@@ -2675,7 +2675,7 @@
           <a:p>
             <a:fld id="{5F3570C4-4F85-4B25-9210-B04BFA5F8AEB}" type="datetimeFigureOut">
               <a:rPr lang="hu-HU" smtClean="0"/>
-              <a:t>2026. 02. 18.</a:t>
+              <a:t>2026. 02. 23.</a:t>
             </a:fld>
             <a:endParaRPr lang="hu-HU"/>
           </a:p>
@@ -2916,7 +2916,7 @@
           <a:p>
             <a:fld id="{5F3570C4-4F85-4B25-9210-B04BFA5F8AEB}" type="datetimeFigureOut">
               <a:rPr lang="hu-HU" smtClean="0"/>
-              <a:t>2026. 02. 18.</a:t>
+              <a:t>2026. 02. 23.</a:t>
             </a:fld>
             <a:endParaRPr lang="hu-HU"/>
           </a:p>
@@ -3501,6 +3501,18 @@
   <p:clrMapOvr>
     <a:masterClrMapping/>
   </p:clrMapOvr>
+  <mc:AlternateContent xmlns:mc="http://schemas.openxmlformats.org/markup-compatibility/2006">
+    <mc:Choice xmlns:p159="http://schemas.microsoft.com/office/powerpoint/2015/09/main" Requires="p159">
+      <p:transition xmlns:p14="http://schemas.microsoft.com/office/powerpoint/2010/main" spd="slow" p14:dur="2000">
+        <p159:morph option="byObject"/>
+      </p:transition>
+    </mc:Choice>
+    <mc:Fallback>
+      <p:transition spd="slow">
+        <p:fade/>
+      </p:transition>
+    </mc:Fallback>
+  </mc:AlternateContent>
 </p:sld>
 </file>
 
@@ -3782,6 +3794,18 @@
   <p:clrMapOvr>
     <a:masterClrMapping/>
   </p:clrMapOvr>
+  <mc:AlternateContent xmlns:mc="http://schemas.openxmlformats.org/markup-compatibility/2006">
+    <mc:Choice xmlns:p159="http://schemas.microsoft.com/office/powerpoint/2015/09/main" Requires="p159">
+      <p:transition xmlns:p14="http://schemas.microsoft.com/office/powerpoint/2010/main" spd="slow" p14:dur="2000">
+        <p159:morph option="byObject"/>
+      </p:transition>
+    </mc:Choice>
+    <mc:Fallback>
+      <p:transition spd="slow">
+        <p:fade/>
+      </p:transition>
+    </mc:Fallback>
+  </mc:AlternateContent>
 </p:sld>
 </file>
 
@@ -4125,6 +4149,18 @@
   <p:clrMapOvr>
     <a:masterClrMapping/>
   </p:clrMapOvr>
+  <mc:AlternateContent xmlns:mc="http://schemas.openxmlformats.org/markup-compatibility/2006">
+    <mc:Choice xmlns:p159="http://schemas.microsoft.com/office/powerpoint/2015/09/main" Requires="p159">
+      <p:transition xmlns:p14="http://schemas.microsoft.com/office/powerpoint/2010/main" spd="slow" p14:dur="2000">
+        <p159:morph option="byObject"/>
+      </p:transition>
+    </mc:Choice>
+    <mc:Fallback>
+      <p:transition spd="slow">
+        <p:fade/>
+      </p:transition>
+    </mc:Fallback>
+  </mc:AlternateContent>
 </p:sld>
 </file>
 
@@ -4443,6 +4479,18 @@
   <p:clrMapOvr>
     <a:masterClrMapping/>
   </p:clrMapOvr>
+  <mc:AlternateContent xmlns:mc="http://schemas.openxmlformats.org/markup-compatibility/2006">
+    <mc:Choice xmlns:p159="http://schemas.microsoft.com/office/powerpoint/2015/09/main" Requires="p159">
+      <p:transition xmlns:p14="http://schemas.microsoft.com/office/powerpoint/2010/main" spd="slow" p14:dur="2000">
+        <p159:morph option="byObject"/>
+      </p:transition>
+    </mc:Choice>
+    <mc:Fallback>
+      <p:transition spd="slow">
+        <p:fade/>
+      </p:transition>
+    </mc:Fallback>
+  </mc:AlternateContent>
 </p:sld>
 </file>
 
@@ -4723,6 +4771,18 @@
   <p:clrMapOvr>
     <a:masterClrMapping/>
   </p:clrMapOvr>
+  <mc:AlternateContent xmlns:mc="http://schemas.openxmlformats.org/markup-compatibility/2006">
+    <mc:Choice xmlns:p159="http://schemas.microsoft.com/office/powerpoint/2015/09/main" Requires="p159">
+      <p:transition xmlns:p14="http://schemas.microsoft.com/office/powerpoint/2010/main" spd="slow" p14:dur="2000">
+        <p159:morph option="byObject"/>
+      </p:transition>
+    </mc:Choice>
+    <mc:Fallback>
+      <p:transition spd="slow">
+        <p:fade/>
+      </p:transition>
+    </mc:Fallback>
+  </mc:AlternateContent>
 </p:sld>
 </file>
 
@@ -5007,6 +5067,18 @@
   <p:clrMapOvr>
     <a:masterClrMapping/>
   </p:clrMapOvr>
+  <mc:AlternateContent xmlns:mc="http://schemas.openxmlformats.org/markup-compatibility/2006">
+    <mc:Choice xmlns:p159="http://schemas.microsoft.com/office/powerpoint/2015/09/main" Requires="p159">
+      <p:transition xmlns:p14="http://schemas.microsoft.com/office/powerpoint/2010/main" spd="slow" p14:dur="2000">
+        <p159:morph option="byObject"/>
+      </p:transition>
+    </mc:Choice>
+    <mc:Fallback>
+      <p:transition spd="slow">
+        <p:fade/>
+      </p:transition>
+    </mc:Fallback>
+  </mc:AlternateContent>
 </p:sld>
 </file>
 
@@ -5368,6 +5440,18 @@
   <p:clrMapOvr>
     <a:masterClrMapping/>
   </p:clrMapOvr>
+  <mc:AlternateContent xmlns:mc="http://schemas.openxmlformats.org/markup-compatibility/2006">
+    <mc:Choice xmlns:p159="http://schemas.microsoft.com/office/powerpoint/2015/09/main" Requires="p159">
+      <p:transition xmlns:p14="http://schemas.microsoft.com/office/powerpoint/2010/main" spd="slow" p14:dur="2000">
+        <p159:morph option="byObject"/>
+      </p:transition>
+    </mc:Choice>
+    <mc:Fallback>
+      <p:transition spd="slow">
+        <p:fade/>
+      </p:transition>
+    </mc:Fallback>
+  </mc:AlternateContent>
 </p:sld>
 </file>
 
@@ -5539,6 +5623,18 @@
   <p:clrMapOvr>
     <a:masterClrMapping/>
   </p:clrMapOvr>
+  <mc:AlternateContent xmlns:mc="http://schemas.openxmlformats.org/markup-compatibility/2006">
+    <mc:Choice xmlns:p159="http://schemas.microsoft.com/office/powerpoint/2015/09/main" Requires="p159">
+      <p:transition xmlns:p14="http://schemas.microsoft.com/office/powerpoint/2010/main" spd="slow" p14:dur="2000">
+        <p159:morph option="byObject"/>
+      </p:transition>
+    </mc:Choice>
+    <mc:Fallback>
+      <p:transition spd="slow">
+        <p:fade/>
+      </p:transition>
+    </mc:Fallback>
+  </mc:AlternateContent>
 </p:sld>
 </file>
 
